--- a/Presentation_ClinicalGuidelinesSummary.pptx
+++ b/Presentation_ClinicalGuidelinesSummary.pptx
@@ -5,10 +5,10 @@
     <p:sldMasterId id="2147483648" r:id="rId1"/>
   </p:sldMasterIdLst>
   <p:notesMasterIdLst>
-    <p:notesMasterId r:id="rId18"/>
+    <p:notesMasterId r:id="rId20"/>
   </p:notesMasterIdLst>
   <p:handoutMasterIdLst>
-    <p:handoutMasterId r:id="rId19"/>
+    <p:handoutMasterId r:id="rId21"/>
   </p:handoutMasterIdLst>
   <p:sldIdLst>
     <p:sldId id="257" r:id="rId2"/>
@@ -25,8 +25,10 @@
     <p:sldId id="330" r:id="rId13"/>
     <p:sldId id="331" r:id="rId14"/>
     <p:sldId id="329" r:id="rId15"/>
-    <p:sldId id="326" r:id="rId16"/>
-    <p:sldId id="269" r:id="rId17"/>
+    <p:sldId id="332" r:id="rId16"/>
+    <p:sldId id="333" r:id="rId17"/>
+    <p:sldId id="326" r:id="rId18"/>
+    <p:sldId id="269" r:id="rId19"/>
   </p:sldIdLst>
   <p:sldSz cx="17348200" cy="9753600"/>
   <p:notesSz cx="17348200" cy="9753600"/>
@@ -204,7 +206,7 @@
           <a:p>
             <a:fld id="{666E61DE-1085-47AB-AAE3-B3539548EBA7}" type="datetimeFigureOut">
               <a:rPr lang="pl-PL" smtClean="0"/>
-              <a:t>2026-04-12</a:t>
+              <a:t>2026-04-13</a:t>
             </a:fld>
             <a:endParaRPr lang="pl-PL"/>
           </a:p>
@@ -412,7 +414,7 @@
           <a:p>
             <a:fld id="{FA2BDDAD-0262-4D49-84E2-04283E1DDE08}" type="datetimeFigureOut">
               <a:rPr lang="pl-PL" smtClean="0"/>
-              <a:t>2026-04-12</a:t>
+              <a:t>2026-04-13</a:t>
             </a:fld>
             <a:endParaRPr lang="pl-PL"/>
           </a:p>
@@ -869,7 +871,7 @@
           <a:p>
             <a:fld id="{F0F44783-92F2-4F12-9659-D20182A0DCA0}" type="slidenum">
               <a:rPr lang="pl-PL" smtClean="0"/>
-              <a:t>16</a:t>
+              <a:t>18</a:t>
             </a:fld>
             <a:endParaRPr lang="pl-PL"/>
           </a:p>
@@ -5112,6 +5114,36 @@
           </a:fontRef>
         </p:style>
       </p:cxnSp>
+      <p:pic>
+        <p:nvPicPr>
+          <p:cNvPr id="3" name="Obraz 2">
+            <a:extLst>
+              <a:ext uri="{FF2B5EF4-FFF2-40B4-BE49-F238E27FC236}">
+                <a16:creationId xmlns:a16="http://schemas.microsoft.com/office/drawing/2014/main" id="{E976E608-7BE6-16FE-F281-49B8DEB12BDB}"/>
+              </a:ext>
+            </a:extLst>
+          </p:cNvPr>
+          <p:cNvPicPr>
+            <a:picLocks noChangeAspect="1"/>
+          </p:cNvPicPr>
+          <p:nvPr/>
+        </p:nvPicPr>
+        <p:blipFill>
+          <a:blip r:embed="rId2"/>
+          <a:stretch>
+            <a:fillRect/>
+          </a:stretch>
+        </p:blipFill>
+        <p:spPr>
+          <a:xfrm>
+            <a:off x="825228" y="1149873"/>
+            <a:ext cx="15697743" cy="7947788"/>
+          </a:xfrm>
+          <a:prstGeom prst="rect">
+            <a:avLst/>
+          </a:prstGeom>
+        </p:spPr>
+      </p:pic>
     </p:spTree>
     <p:extLst>
       <p:ext uri="{BB962C8B-B14F-4D97-AF65-F5344CB8AC3E}">
@@ -5126,6 +5158,713 @@
 </file>
 
 <file path=ppt/slides/slide15.xml><?xml version="1.0" encoding="utf-8"?>
+<p:sld xmlns:a="http://schemas.openxmlformats.org/drawingml/2006/main" xmlns:r="http://schemas.openxmlformats.org/officeDocument/2006/relationships" xmlns:p="http://schemas.openxmlformats.org/presentationml/2006/main">
+  <p:cSld>
+    <p:spTree>
+      <p:nvGrpSpPr>
+        <p:cNvPr id="1" name="">
+          <a:extLst>
+            <a:ext uri="{FF2B5EF4-FFF2-40B4-BE49-F238E27FC236}">
+              <a16:creationId xmlns:a16="http://schemas.microsoft.com/office/drawing/2014/main" id="{031EC8B5-DC80-CA51-252F-AE3AAE9803C8}"/>
+            </a:ext>
+          </a:extLst>
+        </p:cNvPr>
+        <p:cNvGrpSpPr/>
+        <p:nvPr/>
+      </p:nvGrpSpPr>
+      <p:grpSpPr>
+        <a:xfrm>
+          <a:off x="0" y="0"/>
+          <a:ext cx="0" cy="0"/>
+          <a:chOff x="0" y="0"/>
+          <a:chExt cx="0" cy="0"/>
+        </a:xfrm>
+      </p:grpSpPr>
+      <p:sp>
+        <p:nvSpPr>
+          <p:cNvPr id="5" name="Symbol zastępczy numeru slajdu 4">
+            <a:extLst>
+              <a:ext uri="{FF2B5EF4-FFF2-40B4-BE49-F238E27FC236}">
+                <a16:creationId xmlns:a16="http://schemas.microsoft.com/office/drawing/2014/main" id="{244BC5FD-8148-3242-CFB9-1CB6660A736C}"/>
+              </a:ext>
+            </a:extLst>
+          </p:cNvPr>
+          <p:cNvSpPr>
+            <a:spLocks noGrp="1"/>
+          </p:cNvSpPr>
+          <p:nvPr>
+            <p:ph type="sldNum" sz="quarter" idx="11"/>
+          </p:nvPr>
+        </p:nvSpPr>
+        <p:spPr/>
+        <p:txBody>
+          <a:bodyPr/>
+          <a:lstStyle/>
+          <a:p>
+            <a:pPr marL="12700">
+              <a:lnSpc>
+                <a:spcPts val="1925"/>
+              </a:lnSpc>
+            </a:pPr>
+            <a:r>
+              <a:rPr lang="pl-PL"/>
+              <a:t>Page </a:t>
+            </a:r>
+            <a:fld id="{B6F15528-21DE-4FAA-801E-634DDDAF4B2B}" type="slidenum">
+              <a:rPr smtClean="0"/>
+              <a:pPr marL="12700">
+                <a:lnSpc>
+                  <a:spcPts val="1925"/>
+                </a:lnSpc>
+              </a:pPr>
+              <a:t>15</a:t>
+            </a:fld>
+            <a:endParaRPr dirty="0"/>
+          </a:p>
+        </p:txBody>
+      </p:sp>
+      <p:sp>
+        <p:nvSpPr>
+          <p:cNvPr id="8" name="Tytuł 3">
+            <a:extLst>
+              <a:ext uri="{FF2B5EF4-FFF2-40B4-BE49-F238E27FC236}">
+                <a16:creationId xmlns:a16="http://schemas.microsoft.com/office/drawing/2014/main" id="{E8E3336A-EB62-D317-E637-5E30ACFFA241}"/>
+              </a:ext>
+            </a:extLst>
+          </p:cNvPr>
+          <p:cNvSpPr txBox="1">
+            <a:spLocks/>
+          </p:cNvSpPr>
+          <p:nvPr/>
+        </p:nvSpPr>
+        <p:spPr>
+          <a:xfrm>
+            <a:off x="1674813" y="385664"/>
+            <a:ext cx="13984063" cy="671883"/>
+          </a:xfrm>
+          <a:prstGeom prst="rect">
+            <a:avLst/>
+          </a:prstGeom>
+        </p:spPr>
+        <p:style>
+          <a:lnRef idx="1">
+            <a:schemeClr val="accent2"/>
+          </a:lnRef>
+          <a:fillRef idx="2">
+            <a:schemeClr val="accent2"/>
+          </a:fillRef>
+          <a:effectRef idx="1">
+            <a:schemeClr val="accent2"/>
+          </a:effectRef>
+          <a:fontRef idx="minor">
+            <a:schemeClr val="dk1"/>
+          </a:fontRef>
+        </p:style>
+        <p:txBody>
+          <a:bodyPr wrap="square" lIns="0" tIns="0" rIns="0" bIns="0" anchor="ctr">
+            <a:noAutofit/>
+          </a:bodyPr>
+          <a:lstStyle>
+            <a:lvl1pPr eaLnBrk="1" hangingPunct="1">
+              <a:defRPr sz="3600" b="1">
+                <a:solidFill>
+                  <a:schemeClr val="dk1"/>
+                </a:solidFill>
+                <a:latin typeface="+mn-lt"/>
+                <a:ea typeface="+mn-ea"/>
+                <a:cs typeface="+mn-cs"/>
+              </a:defRPr>
+            </a:lvl1pPr>
+            <a:lvl2pPr>
+              <a:defRPr>
+                <a:solidFill>
+                  <a:schemeClr val="dk1"/>
+                </a:solidFill>
+                <a:latin typeface="+mn-lt"/>
+                <a:ea typeface="+mn-ea"/>
+                <a:cs typeface="+mn-cs"/>
+              </a:defRPr>
+            </a:lvl2pPr>
+            <a:lvl3pPr>
+              <a:defRPr>
+                <a:solidFill>
+                  <a:schemeClr val="dk1"/>
+                </a:solidFill>
+                <a:latin typeface="+mn-lt"/>
+                <a:ea typeface="+mn-ea"/>
+                <a:cs typeface="+mn-cs"/>
+              </a:defRPr>
+            </a:lvl3pPr>
+            <a:lvl4pPr>
+              <a:defRPr>
+                <a:solidFill>
+                  <a:schemeClr val="dk1"/>
+                </a:solidFill>
+                <a:latin typeface="+mn-lt"/>
+                <a:ea typeface="+mn-ea"/>
+                <a:cs typeface="+mn-cs"/>
+              </a:defRPr>
+            </a:lvl4pPr>
+            <a:lvl5pPr>
+              <a:defRPr>
+                <a:solidFill>
+                  <a:schemeClr val="dk1"/>
+                </a:solidFill>
+                <a:latin typeface="+mn-lt"/>
+                <a:ea typeface="+mn-ea"/>
+                <a:cs typeface="+mn-cs"/>
+              </a:defRPr>
+            </a:lvl5pPr>
+            <a:lvl6pPr>
+              <a:defRPr>
+                <a:solidFill>
+                  <a:schemeClr val="dk1"/>
+                </a:solidFill>
+                <a:latin typeface="+mn-lt"/>
+                <a:ea typeface="+mn-ea"/>
+                <a:cs typeface="+mn-cs"/>
+              </a:defRPr>
+            </a:lvl6pPr>
+            <a:lvl7pPr>
+              <a:defRPr>
+                <a:solidFill>
+                  <a:schemeClr val="dk1"/>
+                </a:solidFill>
+                <a:latin typeface="+mn-lt"/>
+                <a:ea typeface="+mn-ea"/>
+                <a:cs typeface="+mn-cs"/>
+              </a:defRPr>
+            </a:lvl7pPr>
+            <a:lvl8pPr>
+              <a:defRPr>
+                <a:solidFill>
+                  <a:schemeClr val="dk1"/>
+                </a:solidFill>
+                <a:latin typeface="+mn-lt"/>
+                <a:ea typeface="+mn-ea"/>
+                <a:cs typeface="+mn-cs"/>
+              </a:defRPr>
+            </a:lvl8pPr>
+            <a:lvl9pPr>
+              <a:defRPr>
+                <a:solidFill>
+                  <a:schemeClr val="dk1"/>
+                </a:solidFill>
+                <a:latin typeface="+mn-lt"/>
+                <a:ea typeface="+mn-ea"/>
+                <a:cs typeface="+mn-cs"/>
+              </a:defRPr>
+            </a:lvl9pPr>
+          </a:lstStyle>
+          <a:p>
+            <a:pPr algn="ctr"/>
+            <a:r>
+              <a:rPr lang="pl-PL" sz="4000" kern="0" dirty="0"/>
+              <a:t>Wyniki</a:t>
+            </a:r>
+          </a:p>
+        </p:txBody>
+      </p:sp>
+      <p:cxnSp>
+        <p:nvCxnSpPr>
+          <p:cNvPr id="9" name="Straight Connector 3">
+            <a:extLst>
+              <a:ext uri="{FF2B5EF4-FFF2-40B4-BE49-F238E27FC236}">
+                <a16:creationId xmlns:a16="http://schemas.microsoft.com/office/drawing/2014/main" id="{9638444A-E254-EFD0-7B0E-03B7758B25B7}"/>
+              </a:ext>
+            </a:extLst>
+          </p:cNvPr>
+          <p:cNvCxnSpPr/>
+          <p:nvPr/>
+        </p:nvCxnSpPr>
+        <p:spPr>
+          <a:xfrm flipH="1">
+            <a:off x="0" y="739749"/>
+            <a:ext cx="1674813" cy="0"/>
+          </a:xfrm>
+          <a:prstGeom prst="line">
+            <a:avLst/>
+          </a:prstGeom>
+          <a:ln w="76200">
+            <a:solidFill>
+              <a:srgbClr val="C00000"/>
+            </a:solidFill>
+          </a:ln>
+        </p:spPr>
+        <p:style>
+          <a:lnRef idx="1">
+            <a:schemeClr val="accent1"/>
+          </a:lnRef>
+          <a:fillRef idx="0">
+            <a:schemeClr val="accent1"/>
+          </a:fillRef>
+          <a:effectRef idx="0">
+            <a:schemeClr val="accent1"/>
+          </a:effectRef>
+          <a:fontRef idx="minor">
+            <a:schemeClr val="tx1"/>
+          </a:fontRef>
+        </p:style>
+      </p:cxnSp>
+      <p:pic>
+        <p:nvPicPr>
+          <p:cNvPr id="4" name="Obraz 3">
+            <a:extLst>
+              <a:ext uri="{FF2B5EF4-FFF2-40B4-BE49-F238E27FC236}">
+                <a16:creationId xmlns:a16="http://schemas.microsoft.com/office/drawing/2014/main" id="{DF4D6DD3-DC21-06DE-D38A-5AAD05E25DC4}"/>
+              </a:ext>
+            </a:extLst>
+          </p:cNvPr>
+          <p:cNvPicPr>
+            <a:picLocks noChangeAspect="1"/>
+          </p:cNvPicPr>
+          <p:nvPr/>
+        </p:nvPicPr>
+        <p:blipFill>
+          <a:blip r:embed="rId2"/>
+          <a:stretch>
+            <a:fillRect/>
+          </a:stretch>
+        </p:blipFill>
+        <p:spPr>
+          <a:xfrm>
+            <a:off x="400483" y="3376403"/>
+            <a:ext cx="16547234" cy="3000794"/>
+          </a:xfrm>
+          <a:prstGeom prst="rect">
+            <a:avLst/>
+          </a:prstGeom>
+        </p:spPr>
+      </p:pic>
+      <p:sp>
+        <p:nvSpPr>
+          <p:cNvPr id="6" name="Symbol zastępczy tekstu 1">
+            <a:extLst>
+              <a:ext uri="{FF2B5EF4-FFF2-40B4-BE49-F238E27FC236}">
+                <a16:creationId xmlns:a16="http://schemas.microsoft.com/office/drawing/2014/main" id="{5691BC7C-01C0-04F0-C271-5CC4348268C8}"/>
+              </a:ext>
+            </a:extLst>
+          </p:cNvPr>
+          <p:cNvSpPr txBox="1">
+            <a:spLocks/>
+          </p:cNvSpPr>
+          <p:nvPr/>
+        </p:nvSpPr>
+        <p:spPr>
+          <a:xfrm>
+            <a:off x="410331" y="1824447"/>
+            <a:ext cx="5465154" cy="833624"/>
+          </a:xfrm>
+          <a:prstGeom prst="rect">
+            <a:avLst/>
+          </a:prstGeom>
+          <a:solidFill>
+            <a:schemeClr val="accent2">
+              <a:lumMod val="20000"/>
+              <a:lumOff val="80000"/>
+            </a:schemeClr>
+          </a:solidFill>
+        </p:spPr>
+        <p:txBody>
+          <a:bodyPr wrap="square" lIns="144000" tIns="144000" rIns="144000" bIns="180000" anchor="ctr">
+            <a:noAutofit/>
+          </a:bodyPr>
+          <a:lstStyle>
+            <a:lvl1pPr marL="0" eaLnBrk="1" hangingPunct="1">
+              <a:defRPr sz="2400">
+                <a:latin typeface="Arial" panose="020B0604020202020204" pitchFamily="34" charset="0"/>
+                <a:ea typeface="+mn-ea"/>
+                <a:cs typeface="Arial" panose="020B0604020202020204" pitchFamily="34" charset="0"/>
+              </a:defRPr>
+            </a:lvl1pPr>
+            <a:lvl2pPr marL="457200" eaLnBrk="1" hangingPunct="1">
+              <a:defRPr>
+                <a:latin typeface="+mn-lt"/>
+                <a:ea typeface="+mn-ea"/>
+                <a:cs typeface="+mn-cs"/>
+              </a:defRPr>
+            </a:lvl2pPr>
+            <a:lvl3pPr marL="914400" eaLnBrk="1" hangingPunct="1">
+              <a:defRPr>
+                <a:latin typeface="+mn-lt"/>
+                <a:ea typeface="+mn-ea"/>
+                <a:cs typeface="+mn-cs"/>
+              </a:defRPr>
+            </a:lvl3pPr>
+            <a:lvl4pPr marL="1371600" eaLnBrk="1" hangingPunct="1">
+              <a:defRPr>
+                <a:latin typeface="+mn-lt"/>
+                <a:ea typeface="+mn-ea"/>
+                <a:cs typeface="+mn-cs"/>
+              </a:defRPr>
+            </a:lvl4pPr>
+            <a:lvl5pPr marL="1828800" eaLnBrk="1" hangingPunct="1">
+              <a:defRPr>
+                <a:latin typeface="+mn-lt"/>
+                <a:ea typeface="+mn-ea"/>
+                <a:cs typeface="+mn-cs"/>
+              </a:defRPr>
+            </a:lvl5pPr>
+            <a:lvl6pPr marL="2286000" eaLnBrk="1" hangingPunct="1">
+              <a:defRPr>
+                <a:latin typeface="+mn-lt"/>
+                <a:ea typeface="+mn-ea"/>
+                <a:cs typeface="+mn-cs"/>
+              </a:defRPr>
+            </a:lvl6pPr>
+            <a:lvl7pPr marL="2743200" eaLnBrk="1" hangingPunct="1">
+              <a:defRPr>
+                <a:latin typeface="+mn-lt"/>
+                <a:ea typeface="+mn-ea"/>
+                <a:cs typeface="+mn-cs"/>
+              </a:defRPr>
+            </a:lvl7pPr>
+            <a:lvl8pPr marL="3200400" eaLnBrk="1" hangingPunct="1">
+              <a:defRPr>
+                <a:latin typeface="+mn-lt"/>
+                <a:ea typeface="+mn-ea"/>
+                <a:cs typeface="+mn-cs"/>
+              </a:defRPr>
+            </a:lvl8pPr>
+            <a:lvl9pPr marL="3657600" eaLnBrk="1" hangingPunct="1">
+              <a:defRPr>
+                <a:latin typeface="+mn-lt"/>
+                <a:ea typeface="+mn-ea"/>
+                <a:cs typeface="+mn-cs"/>
+              </a:defRPr>
+            </a:lvl9pPr>
+          </a:lstStyle>
+          <a:p>
+            <a:pPr lvl="0" algn="just" eaLnBrk="0" fontAlgn="base" hangingPunct="0">
+              <a:spcBef>
+                <a:spcPct val="0"/>
+              </a:spcBef>
+              <a:spcAft>
+                <a:spcPct val="0"/>
+              </a:spcAft>
+            </a:pPr>
+            <a:r>
+              <a:rPr lang="pl-PL" b="1" kern="0" dirty="0">
+                <a:solidFill>
+                  <a:sysClr val="windowText" lastClr="000000"/>
+                </a:solidFill>
+              </a:rPr>
+              <a:t>2 próba tego samego zapytania:</a:t>
+            </a:r>
+            <a:endParaRPr lang="pl-PL" kern="0" dirty="0">
+              <a:solidFill>
+                <a:sysClr val="windowText" lastClr="000000"/>
+              </a:solidFill>
+            </a:endParaRPr>
+          </a:p>
+        </p:txBody>
+      </p:sp>
+    </p:spTree>
+    <p:extLst>
+      <p:ext uri="{BB962C8B-B14F-4D97-AF65-F5344CB8AC3E}">
+        <p14:creationId xmlns:p14="http://schemas.microsoft.com/office/powerpoint/2010/main" val="2355658272"/>
+      </p:ext>
+    </p:extLst>
+  </p:cSld>
+  <p:clrMapOvr>
+    <a:masterClrMapping/>
+  </p:clrMapOvr>
+</p:sld>
+</file>
+
+<file path=ppt/slides/slide16.xml><?xml version="1.0" encoding="utf-8"?>
+<p:sld xmlns:a="http://schemas.openxmlformats.org/drawingml/2006/main" xmlns:r="http://schemas.openxmlformats.org/officeDocument/2006/relationships" xmlns:p="http://schemas.openxmlformats.org/presentationml/2006/main">
+  <p:cSld>
+    <p:spTree>
+      <p:nvGrpSpPr>
+        <p:cNvPr id="1" name="">
+          <a:extLst>
+            <a:ext uri="{FF2B5EF4-FFF2-40B4-BE49-F238E27FC236}">
+              <a16:creationId xmlns:a16="http://schemas.microsoft.com/office/drawing/2014/main" id="{2C4E9134-64EC-78B8-DEFF-9A121A200707}"/>
+            </a:ext>
+          </a:extLst>
+        </p:cNvPr>
+        <p:cNvGrpSpPr/>
+        <p:nvPr/>
+      </p:nvGrpSpPr>
+      <p:grpSpPr>
+        <a:xfrm>
+          <a:off x="0" y="0"/>
+          <a:ext cx="0" cy="0"/>
+          <a:chOff x="0" y="0"/>
+          <a:chExt cx="0" cy="0"/>
+        </a:xfrm>
+      </p:grpSpPr>
+      <p:sp>
+        <p:nvSpPr>
+          <p:cNvPr id="5" name="Symbol zastępczy numeru slajdu 4">
+            <a:extLst>
+              <a:ext uri="{FF2B5EF4-FFF2-40B4-BE49-F238E27FC236}">
+                <a16:creationId xmlns:a16="http://schemas.microsoft.com/office/drawing/2014/main" id="{760A027D-33B6-8BCA-21FF-9FD5154B5336}"/>
+              </a:ext>
+            </a:extLst>
+          </p:cNvPr>
+          <p:cNvSpPr>
+            <a:spLocks noGrp="1"/>
+          </p:cNvSpPr>
+          <p:nvPr>
+            <p:ph type="sldNum" sz="quarter" idx="11"/>
+          </p:nvPr>
+        </p:nvSpPr>
+        <p:spPr/>
+        <p:txBody>
+          <a:bodyPr/>
+          <a:lstStyle/>
+          <a:p>
+            <a:pPr marL="12700">
+              <a:lnSpc>
+                <a:spcPts val="1925"/>
+              </a:lnSpc>
+            </a:pPr>
+            <a:r>
+              <a:rPr lang="pl-PL"/>
+              <a:t>Page </a:t>
+            </a:r>
+            <a:fld id="{B6F15528-21DE-4FAA-801E-634DDDAF4B2B}" type="slidenum">
+              <a:rPr smtClean="0"/>
+              <a:pPr marL="12700">
+                <a:lnSpc>
+                  <a:spcPts val="1925"/>
+                </a:lnSpc>
+              </a:pPr>
+              <a:t>16</a:t>
+            </a:fld>
+            <a:endParaRPr dirty="0"/>
+          </a:p>
+        </p:txBody>
+      </p:sp>
+      <p:sp>
+        <p:nvSpPr>
+          <p:cNvPr id="8" name="Tytuł 3">
+            <a:extLst>
+              <a:ext uri="{FF2B5EF4-FFF2-40B4-BE49-F238E27FC236}">
+                <a16:creationId xmlns:a16="http://schemas.microsoft.com/office/drawing/2014/main" id="{C404C2FF-DFD7-98DC-3C55-738DD21176B7}"/>
+              </a:ext>
+            </a:extLst>
+          </p:cNvPr>
+          <p:cNvSpPr txBox="1">
+            <a:spLocks/>
+          </p:cNvSpPr>
+          <p:nvPr/>
+        </p:nvSpPr>
+        <p:spPr>
+          <a:xfrm>
+            <a:off x="1674813" y="385664"/>
+            <a:ext cx="13984063" cy="671883"/>
+          </a:xfrm>
+          <a:prstGeom prst="rect">
+            <a:avLst/>
+          </a:prstGeom>
+        </p:spPr>
+        <p:style>
+          <a:lnRef idx="1">
+            <a:schemeClr val="accent2"/>
+          </a:lnRef>
+          <a:fillRef idx="2">
+            <a:schemeClr val="accent2"/>
+          </a:fillRef>
+          <a:effectRef idx="1">
+            <a:schemeClr val="accent2"/>
+          </a:effectRef>
+          <a:fontRef idx="minor">
+            <a:schemeClr val="dk1"/>
+          </a:fontRef>
+        </p:style>
+        <p:txBody>
+          <a:bodyPr wrap="square" lIns="0" tIns="0" rIns="0" bIns="0" anchor="ctr">
+            <a:noAutofit/>
+          </a:bodyPr>
+          <a:lstStyle>
+            <a:lvl1pPr eaLnBrk="1" hangingPunct="1">
+              <a:defRPr sz="3600" b="1">
+                <a:solidFill>
+                  <a:schemeClr val="dk1"/>
+                </a:solidFill>
+                <a:latin typeface="+mn-lt"/>
+                <a:ea typeface="+mn-ea"/>
+                <a:cs typeface="+mn-cs"/>
+              </a:defRPr>
+            </a:lvl1pPr>
+            <a:lvl2pPr>
+              <a:defRPr>
+                <a:solidFill>
+                  <a:schemeClr val="dk1"/>
+                </a:solidFill>
+                <a:latin typeface="+mn-lt"/>
+                <a:ea typeface="+mn-ea"/>
+                <a:cs typeface="+mn-cs"/>
+              </a:defRPr>
+            </a:lvl2pPr>
+            <a:lvl3pPr>
+              <a:defRPr>
+                <a:solidFill>
+                  <a:schemeClr val="dk1"/>
+                </a:solidFill>
+                <a:latin typeface="+mn-lt"/>
+                <a:ea typeface="+mn-ea"/>
+                <a:cs typeface="+mn-cs"/>
+              </a:defRPr>
+            </a:lvl3pPr>
+            <a:lvl4pPr>
+              <a:defRPr>
+                <a:solidFill>
+                  <a:schemeClr val="dk1"/>
+                </a:solidFill>
+                <a:latin typeface="+mn-lt"/>
+                <a:ea typeface="+mn-ea"/>
+                <a:cs typeface="+mn-cs"/>
+              </a:defRPr>
+            </a:lvl4pPr>
+            <a:lvl5pPr>
+              <a:defRPr>
+                <a:solidFill>
+                  <a:schemeClr val="dk1"/>
+                </a:solidFill>
+                <a:latin typeface="+mn-lt"/>
+                <a:ea typeface="+mn-ea"/>
+                <a:cs typeface="+mn-cs"/>
+              </a:defRPr>
+            </a:lvl5pPr>
+            <a:lvl6pPr>
+              <a:defRPr>
+                <a:solidFill>
+                  <a:schemeClr val="dk1"/>
+                </a:solidFill>
+                <a:latin typeface="+mn-lt"/>
+                <a:ea typeface="+mn-ea"/>
+                <a:cs typeface="+mn-cs"/>
+              </a:defRPr>
+            </a:lvl6pPr>
+            <a:lvl7pPr>
+              <a:defRPr>
+                <a:solidFill>
+                  <a:schemeClr val="dk1"/>
+                </a:solidFill>
+                <a:latin typeface="+mn-lt"/>
+                <a:ea typeface="+mn-ea"/>
+                <a:cs typeface="+mn-cs"/>
+              </a:defRPr>
+            </a:lvl7pPr>
+            <a:lvl8pPr>
+              <a:defRPr>
+                <a:solidFill>
+                  <a:schemeClr val="dk1"/>
+                </a:solidFill>
+                <a:latin typeface="+mn-lt"/>
+                <a:ea typeface="+mn-ea"/>
+                <a:cs typeface="+mn-cs"/>
+              </a:defRPr>
+            </a:lvl8pPr>
+            <a:lvl9pPr>
+              <a:defRPr>
+                <a:solidFill>
+                  <a:schemeClr val="dk1"/>
+                </a:solidFill>
+                <a:latin typeface="+mn-lt"/>
+                <a:ea typeface="+mn-ea"/>
+                <a:cs typeface="+mn-cs"/>
+              </a:defRPr>
+            </a:lvl9pPr>
+          </a:lstStyle>
+          <a:p>
+            <a:pPr algn="ctr"/>
+            <a:r>
+              <a:rPr lang="pl-PL" sz="4000" kern="0" dirty="0"/>
+              <a:t>Wyniki</a:t>
+            </a:r>
+          </a:p>
+        </p:txBody>
+      </p:sp>
+      <p:cxnSp>
+        <p:nvCxnSpPr>
+          <p:cNvPr id="9" name="Straight Connector 3">
+            <a:extLst>
+              <a:ext uri="{FF2B5EF4-FFF2-40B4-BE49-F238E27FC236}">
+                <a16:creationId xmlns:a16="http://schemas.microsoft.com/office/drawing/2014/main" id="{6CD875C1-76FF-963B-CF8D-F06D7DB8E30C}"/>
+              </a:ext>
+            </a:extLst>
+          </p:cNvPr>
+          <p:cNvCxnSpPr/>
+          <p:nvPr/>
+        </p:nvCxnSpPr>
+        <p:spPr>
+          <a:xfrm flipH="1">
+            <a:off x="0" y="739749"/>
+            <a:ext cx="1674813" cy="0"/>
+          </a:xfrm>
+          <a:prstGeom prst="line">
+            <a:avLst/>
+          </a:prstGeom>
+          <a:ln w="76200">
+            <a:solidFill>
+              <a:srgbClr val="C00000"/>
+            </a:solidFill>
+          </a:ln>
+        </p:spPr>
+        <p:style>
+          <a:lnRef idx="1">
+            <a:schemeClr val="accent1"/>
+          </a:lnRef>
+          <a:fillRef idx="0">
+            <a:schemeClr val="accent1"/>
+          </a:fillRef>
+          <a:effectRef idx="0">
+            <a:schemeClr val="accent1"/>
+          </a:effectRef>
+          <a:fontRef idx="minor">
+            <a:schemeClr val="tx1"/>
+          </a:fontRef>
+        </p:style>
+      </p:cxnSp>
+      <p:pic>
+        <p:nvPicPr>
+          <p:cNvPr id="4" name="Obraz 3">
+            <a:extLst>
+              <a:ext uri="{FF2B5EF4-FFF2-40B4-BE49-F238E27FC236}">
+                <a16:creationId xmlns:a16="http://schemas.microsoft.com/office/drawing/2014/main" id="{E15E2F06-AA01-E234-B713-7E6352FDDE64}"/>
+              </a:ext>
+            </a:extLst>
+          </p:cNvPr>
+          <p:cNvPicPr>
+            <a:picLocks noChangeAspect="1"/>
+          </p:cNvPicPr>
+          <p:nvPr/>
+        </p:nvPicPr>
+        <p:blipFill>
+          <a:blip r:embed="rId2"/>
+          <a:stretch>
+            <a:fillRect/>
+          </a:stretch>
+        </p:blipFill>
+        <p:spPr>
+          <a:xfrm>
+            <a:off x="177156" y="124272"/>
+            <a:ext cx="16577792" cy="8623848"/>
+          </a:xfrm>
+          <a:prstGeom prst="rect">
+            <a:avLst/>
+          </a:prstGeom>
+        </p:spPr>
+      </p:pic>
+    </p:spTree>
+    <p:extLst>
+      <p:ext uri="{BB962C8B-B14F-4D97-AF65-F5344CB8AC3E}">
+        <p14:creationId xmlns:p14="http://schemas.microsoft.com/office/powerpoint/2010/main" val="3777562250"/>
+      </p:ext>
+    </p:extLst>
+  </p:cSld>
+  <p:clrMapOvr>
+    <a:masterClrMapping/>
+  </p:clrMapOvr>
+</p:sld>
+</file>
+
+<file path=ppt/slides/slide17.xml><?xml version="1.0" encoding="utf-8"?>
 <p:sld xmlns:a="http://schemas.openxmlformats.org/drawingml/2006/main" xmlns:r="http://schemas.openxmlformats.org/officeDocument/2006/relationships" xmlns:p="http://schemas.openxmlformats.org/presentationml/2006/main">
   <p:cSld>
     <p:spTree>
@@ -5179,7 +5918,7 @@
                   <a:spcPts val="1925"/>
                 </a:lnSpc>
               </a:pPr>
-              <a:t>15</a:t>
+              <a:t>17</a:t>
             </a:fld>
             <a:endParaRPr dirty="0"/>
           </a:p>
@@ -5376,7 +6115,7 @@
 </p:sld>
 </file>
 
-<file path=ppt/slides/slide16.xml><?xml version="1.0" encoding="utf-8"?>
+<file path=ppt/slides/slide18.xml><?xml version="1.0" encoding="utf-8"?>
 <p:sld xmlns:a="http://schemas.openxmlformats.org/drawingml/2006/main" xmlns:r="http://schemas.openxmlformats.org/officeDocument/2006/relationships" xmlns:p="http://schemas.openxmlformats.org/presentationml/2006/main">
   <p:cSld>
     <p:spTree>
